--- a/presentation/extra_slides.pptx
+++ b/presentation/extra_slides.pptx
@@ -7,9 +7,10 @@
   <p:sldIdLst>
     <p:sldId id="256" r:id="rId2"/>
     <p:sldId id="257" r:id="rId3"/>
+    <p:sldId id="258" r:id="rId4"/>
   </p:sldIdLst>
   <p:notesMasterIdLst>
-    <p:notesMasterId r:id="rId4"/>
+    <p:notesMasterId r:id="rId5"/>
   </p:notesMasterIdLst>
   <p:sldSz cx="12192000" cy="6858000"/>
   <p:notesSz cx="6858000" cy="12192000"/>
@@ -633,6 +634,94 @@
 </p:notes>
 </file>
 
+<file path=ppt/notesSlides/notesSlide3.xml><?xml version="1.0" encoding="utf-8"?>
+<p:notes xmlns:a="http://schemas.openxmlformats.org/drawingml/2006/main" xmlns:r="http://schemas.openxmlformats.org/officeDocument/2006/relationships" xmlns:p="http://schemas.openxmlformats.org/presentationml/2006/main">
+  <p:cSld>
+    <p:spTree>
+      <p:nvGrpSpPr>
+        <p:cNvPr id="1" name=""/>
+        <p:cNvGrpSpPr/>
+        <p:nvPr/>
+      </p:nvGrpSpPr>
+      <p:grpSpPr>
+        <a:xfrm>
+          <a:off x="0" y="0"/>
+          <a:ext cx="0" cy="0"/>
+          <a:chOff x="0" y="0"/>
+          <a:chExt cx="0" cy="0"/>
+        </a:xfrm>
+      </p:grpSpPr>
+      <p:sp>
+        <p:nvSpPr>
+          <p:cNvPr id="2" name="Slide Image Placeholder 1"/>
+          <p:cNvSpPr>
+            <a:spLocks noGrp="1" noRot="1" noChangeAspect="1"/>
+          </p:cNvSpPr>
+          <p:nvPr>
+            <p:ph type="sldImg"/>
+          </p:nvPr>
+        </p:nvSpPr>
+        <p:spPr/>
+      </p:sp>
+      <p:sp>
+        <p:nvSpPr>
+          <p:cNvPr id="3" name="Notes Placeholder 2"/>
+          <p:cNvSpPr>
+            <a:spLocks noGrp="1"/>
+          </p:cNvSpPr>
+          <p:nvPr>
+            <p:ph type="body" idx="1"/>
+          </p:nvPr>
+        </p:nvSpPr>
+        <p:spPr/>
+        <p:txBody>
+          <a:bodyPr/>
+          <a:lstStyle/>
+          <a:p>
+            <a:r>
+              <a:rPr lang="en-US" dirty="0"/>
+              <a:t/>
+            </a:r>
+            <a:endParaRPr lang="en-US" dirty="0"/>
+          </a:p>
+        </p:txBody>
+      </p:sp>
+      <p:sp>
+        <p:nvSpPr>
+          <p:cNvPr id="4" name="Slide Number Placeholder 3"/>
+          <p:cNvSpPr>
+            <a:spLocks noGrp="1"/>
+          </p:cNvSpPr>
+          <p:nvPr>
+            <p:ph type="sldNum" sz="quarter" idx="10"/>
+          </p:nvPr>
+        </p:nvSpPr>
+        <p:spPr/>
+        <p:txBody>
+          <a:bodyPr/>
+          <a:lstStyle/>
+          <a:p>
+            <a:fld id="{F7021451-1387-4CA6-816F-3879F97B5CBC}" type="slidenum">
+              <a:rPr lang="en-US"/>
+              <a:t>3</a:t>
+            </a:fld>
+            <a:endParaRPr lang="en-US"/>
+          </a:p>
+        </p:txBody>
+      </p:sp>
+    </p:spTree>
+    <p:extLst>
+      <p:ext uri="{BB962C8B-B14F-4D97-AF65-F5344CB8AC3E}">
+        <p14:creationId xmlns:p14="http://schemas.microsoft.com/office/powerpoint/2010/main" val="1024086991"/>
+      </p:ext>
+    </p:extLst>
+  </p:cSld>
+  <p:clrMapOvr>
+    <a:masterClrMapping/>
+  </p:clrMapOvr>
+</p:notes>
+</file>
+
 <file path=ppt/slideLayouts/slideLayout1.xml><?xml version="1.0" encoding="utf-8"?>
 <p:sldLayout xmlns:a="http://schemas.openxmlformats.org/drawingml/2006/main" xmlns:r="http://schemas.openxmlformats.org/officeDocument/2006/relationships" xmlns:p="http://schemas.openxmlformats.org/presentationml/2006/main" preserve="1">
   <p:cSld name="DEFAULT">
@@ -3018,6 +3107,661 @@
       <p:sp>
         <p:nvSpPr>
           <p:cNvPr id="31" name="Text 29"/>
+          <p:cNvSpPr/>
+          <p:nvPr/>
+        </p:nvSpPr>
+        <p:spPr>
+          <a:xfrm>
+            <a:off x="457200" y="6510528"/>
+            <a:ext cx="9601200" cy="274320"/>
+          </a:xfrm>
+          <a:prstGeom prst="rect">
+            <a:avLst/>
+          </a:prstGeom>
+          <a:noFill/>
+          <a:ln/>
+        </p:spPr>
+        <p:txBody>
+          <a:bodyPr wrap="square" lIns="0" tIns="0" rIns="0" bIns="0" rtlCol="0" anchor="ctr"/>
+          <a:lstStyle/>
+          <a:p>
+            <a:pPr algn="l" indent="0" marL="0">
+              <a:buNone/>
+            </a:pPr>
+            <a:r>
+              <a:rPr lang="en-US" sz="1050" dirty="0">
+                <a:solidFill>
+                  <a:srgbClr val="5C6E73"/>
+                </a:solidFill>
+              </a:rPr>
+              <a:t>Computational Genomics 76553  ·  HUJI  ·  MASLD snRNA-seq hackathon</a:t>
+            </a:r>
+            <a:endParaRPr lang="en-US" sz="1050" dirty="0"/>
+          </a:p>
+        </p:txBody>
+      </p:sp>
+    </p:spTree>
+  </p:cSld>
+  <p:clrMapOvr>
+    <a:masterClrMapping/>
+  </p:clrMapOvr>
+</p:sld>
+</file>
+
+<file path=ppt/slides/slide3.xml><?xml version="1.0" encoding="utf-8"?>
+<p:sld xmlns:a="http://schemas.openxmlformats.org/drawingml/2006/main" xmlns:r="http://schemas.openxmlformats.org/officeDocument/2006/relationships" xmlns:p="http://schemas.openxmlformats.org/presentationml/2006/main">
+  <p:cSld name="Slide 3">
+    <p:bg>
+      <p:bgPr>
+        <a:solidFill>
+          <a:srgbClr val="F7F5F1"/>
+        </a:solidFill>
+      </p:bgPr>
+    </p:bg>
+    <p:spTree>
+      <p:nvGrpSpPr>
+        <p:cNvPr id="1" name=""/>
+        <p:cNvGrpSpPr/>
+        <p:nvPr/>
+      </p:nvGrpSpPr>
+      <p:grpSpPr>
+        <a:xfrm>
+          <a:off x="0" y="0"/>
+          <a:ext cx="0" cy="0"/>
+          <a:chOff x="0" y="0"/>
+          <a:chExt cx="0" cy="0"/>
+        </a:xfrm>
+      </p:grpSpPr>
+      <p:sp>
+        <p:nvSpPr>
+          <p:cNvPr id="2" name="Shape 0"/>
+          <p:cNvSpPr/>
+          <p:nvPr/>
+        </p:nvSpPr>
+        <p:spPr>
+          <a:xfrm>
+            <a:off x="0" y="0"/>
+            <a:ext cx="12191695" cy="6858000"/>
+          </a:xfrm>
+          <a:prstGeom prst="rect">
+            <a:avLst/>
+          </a:prstGeom>
+          <a:solidFill>
+            <a:srgbClr val="F7F5F1"/>
+          </a:solidFill>
+          <a:ln/>
+        </p:spPr>
+      </p:sp>
+      <p:sp>
+        <p:nvSpPr>
+          <p:cNvPr id="3" name="Shape 1"/>
+          <p:cNvSpPr/>
+          <p:nvPr/>
+        </p:nvSpPr>
+        <p:spPr>
+          <a:xfrm>
+            <a:off x="457200" y="310896"/>
+            <a:ext cx="146304" cy="237744"/>
+          </a:xfrm>
+          <a:prstGeom prst="rect">
+            <a:avLst/>
+          </a:prstGeom>
+          <a:solidFill>
+            <a:srgbClr val="C0561B"/>
+          </a:solidFill>
+          <a:ln/>
+        </p:spPr>
+      </p:sp>
+      <p:sp>
+        <p:nvSpPr>
+          <p:cNvPr id="4" name="Text 2"/>
+          <p:cNvSpPr/>
+          <p:nvPr/>
+        </p:nvSpPr>
+        <p:spPr>
+          <a:xfrm>
+            <a:off x="676656" y="274320"/>
+            <a:ext cx="7863840" cy="320040"/>
+          </a:xfrm>
+          <a:prstGeom prst="rect">
+            <a:avLst/>
+          </a:prstGeom>
+          <a:noFill/>
+          <a:ln/>
+        </p:spPr>
+        <p:txBody>
+          <a:bodyPr wrap="square" lIns="0" tIns="0" rIns="0" bIns="0" rtlCol="0" anchor="ctr"/>
+          <a:lstStyle/>
+          <a:p>
+            <a:pPr algn="l" indent="0" marL="0">
+              <a:buNone/>
+            </a:pPr>
+            <a:r>
+              <a:rPr lang="en-US" sz="1300" b="1" spc="300" kern="0" dirty="0">
+                <a:solidFill>
+                  <a:srgbClr val="C0561B"/>
+                </a:solidFill>
+              </a:rPr>
+              <a:t>SOURCE</a:t>
+            </a:r>
+            <a:endParaRPr lang="en-US" sz="1300" dirty="0"/>
+          </a:p>
+        </p:txBody>
+      </p:sp>
+      <p:sp>
+        <p:nvSpPr>
+          <p:cNvPr id="5" name="Text 3"/>
+          <p:cNvSpPr/>
+          <p:nvPr/>
+        </p:nvSpPr>
+        <p:spPr>
+          <a:xfrm>
+            <a:off x="8595360" y="292608"/>
+            <a:ext cx="3154680" cy="274320"/>
+          </a:xfrm>
+          <a:prstGeom prst="rect">
+            <a:avLst/>
+          </a:prstGeom>
+          <a:noFill/>
+          <a:ln/>
+        </p:spPr>
+        <p:txBody>
+          <a:bodyPr wrap="square" lIns="0" tIns="0" rIns="0" bIns="0" rtlCol="0" anchor="ctr"/>
+          <a:lstStyle/>
+          <a:p>
+            <a:pPr algn="r" indent="0" marL="0">
+              <a:buNone/>
+            </a:pPr>
+            <a:r>
+              <a:rPr lang="en-US" sz="1100" b="1" spc="200" kern="0" dirty="0">
+                <a:solidFill>
+                  <a:srgbClr val="1B6E78"/>
+                </a:solidFill>
+              </a:rPr>
+              <a:t>RESULTS</a:t>
+            </a:r>
+            <a:endParaRPr lang="en-US" sz="1100" dirty="0"/>
+          </a:p>
+        </p:txBody>
+      </p:sp>
+      <p:sp>
+        <p:nvSpPr>
+          <p:cNvPr id="6" name="Text 4"/>
+          <p:cNvSpPr/>
+          <p:nvPr/>
+        </p:nvSpPr>
+        <p:spPr>
+          <a:xfrm>
+            <a:off x="438912" y="585216"/>
+            <a:ext cx="11338560" cy="777240"/>
+          </a:xfrm>
+          <a:prstGeom prst="rect">
+            <a:avLst/>
+          </a:prstGeom>
+          <a:noFill/>
+          <a:ln/>
+        </p:spPr>
+        <p:txBody>
+          <a:bodyPr wrap="square" lIns="0" tIns="0" rIns="0" bIns="0" rtlCol="0" anchor="t"/>
+          <a:lstStyle/>
+          <a:p>
+            <a:pPr algn="l" indent="0" marL="0">
+              <a:buNone/>
+            </a:pPr>
+            <a:r>
+              <a:rPr lang="en-US" sz="2800" b="1" dirty="0">
+                <a:solidFill>
+                  <a:srgbClr val="1B2B31"/>
+                </a:solidFill>
+                <a:latin typeface="Georgia" pitchFamily="34" charset="0"/>
+                <a:ea typeface="Georgia" pitchFamily="34" charset="-122"/>
+                <a:cs typeface="Georgia" pitchFamily="34" charset="-120"/>
+              </a:rPr>
+              <a:t>The biliary signal: most likely compositional — a lead</a:t>
+            </a:r>
+            <a:endParaRPr lang="en-US" sz="2800" dirty="0"/>
+          </a:p>
+        </p:txBody>
+      </p:sp>
+      <p:sp>
+        <p:nvSpPr>
+          <p:cNvPr id="7" name="Text 5"/>
+          <p:cNvSpPr/>
+          <p:nvPr/>
+        </p:nvSpPr>
+        <p:spPr>
+          <a:xfrm>
+            <a:off x="640080" y="1335024"/>
+            <a:ext cx="11247120" cy="411480"/>
+          </a:xfrm>
+          <a:prstGeom prst="rect">
+            <a:avLst/>
+          </a:prstGeom>
+          <a:noFill/>
+          <a:ln/>
+        </p:spPr>
+        <p:txBody>
+          <a:bodyPr wrap="square" rtlCol="0" anchor="ctr"/>
+          <a:lstStyle/>
+          <a:p>
+            <a:pPr algn="l" indent="0" marL="0">
+              <a:buNone/>
+            </a:pPr>
+            <a:r>
+              <a:rPr lang="en-US" sz="1450" b="1" dirty="0">
+                <a:solidFill>
+                  <a:srgbClr val="1B2B31"/>
+                </a:solidFill>
+              </a:rPr>
+              <a:t>What we see:  </a:t>
+            </a:r>
+            <a:pPr algn="l" indent="0" marL="0">
+              <a:buNone/>
+            </a:pPr>
+            <a:r>
+              <a:rPr lang="en-US" sz="1450" dirty="0">
+                <a:solidFill>
+                  <a:srgbClr val="1B2B31"/>
+                </a:solidFill>
+              </a:rPr>
+              <a:t>biliary / ductular genes (EPCAM, SOX9, GRHL2, B3GNT3, SPINT2) rise at F4 — exactly where cirrhosis’s ductular reaction floods the tissue with cholangiocytes.</a:t>
+            </a:r>
+            <a:endParaRPr lang="en-US" sz="1450" dirty="0"/>
+          </a:p>
+        </p:txBody>
+      </p:sp>
+      <p:pic>
+        <p:nvPicPr>
+          <p:cNvPr id="8" name="Image 0" descr="D:\CS\Genomics\Hackathon\presentation/assets/fig_compositional.png">    </p:cNvPr>
+          <p:cNvPicPr>
+            <a:picLocks noChangeAspect="1"/>
+          </p:cNvPicPr>
+          <p:nvPr/>
+        </p:nvPicPr>
+        <p:blipFill>
+          <a:blip r:embed="rId1"/>
+          <a:stretch>
+            <a:fillRect/>
+          </a:stretch>
+        </p:blipFill>
+        <p:spPr>
+          <a:xfrm>
+            <a:off x="3791788" y="1783080"/>
+            <a:ext cx="4623665" cy="1828800"/>
+          </a:xfrm>
+          <a:prstGeom prst="rect">
+            <a:avLst/>
+          </a:prstGeom>
+        </p:spPr>
+      </p:pic>
+      <p:sp>
+        <p:nvSpPr>
+          <p:cNvPr id="9" name="Text 6"/>
+          <p:cNvSpPr/>
+          <p:nvPr/>
+        </p:nvSpPr>
+        <p:spPr>
+          <a:xfrm>
+            <a:off x="365760" y="3657600"/>
+            <a:ext cx="11475720" cy="365760"/>
+          </a:xfrm>
+          <a:prstGeom prst="rect">
+            <a:avLst/>
+          </a:prstGeom>
+          <a:noFill/>
+          <a:ln/>
+        </p:spPr>
+        <p:txBody>
+          <a:bodyPr wrap="square" lIns="0" tIns="0" rIns="0" bIns="0" rtlCol="0" anchor="ctr"/>
+          <a:lstStyle/>
+          <a:p>
+            <a:pPr algn="ctr" indent="0" marL="0">
+              <a:buNone/>
+            </a:pPr>
+            <a:r>
+              <a:rPr lang="en-US" sz="1200" i="1" dirty="0">
+                <a:solidFill>
+                  <a:srgbClr val="5C6E73"/>
+                </a:solidFill>
+              </a:rPr>
+              <a:t>Figure.  Source attribution — cross-lineage abundance, decontX ambient-RNA removal, and the F4 ductular reaction.</a:t>
+            </a:r>
+            <a:endParaRPr lang="en-US" sz="1200" dirty="0"/>
+          </a:p>
+        </p:txBody>
+      </p:sp>
+      <p:sp>
+        <p:nvSpPr>
+          <p:cNvPr id="10" name="Shape 7"/>
+          <p:cNvSpPr/>
+          <p:nvPr/>
+        </p:nvSpPr>
+        <p:spPr>
+          <a:xfrm>
+            <a:off x="548640" y="4041648"/>
+            <a:ext cx="11201400" cy="603504"/>
+          </a:xfrm>
+          <a:prstGeom prst="roundRect">
+            <a:avLst>
+              <a:gd name="adj" fmla="val 7576"/>
+            </a:avLst>
+          </a:prstGeom>
+          <a:solidFill>
+            <a:srgbClr val="E7F2ED"/>
+          </a:solidFill>
+          <a:ln/>
+        </p:spPr>
+      </p:sp>
+      <p:sp>
+        <p:nvSpPr>
+          <p:cNvPr id="11" name="Text 8"/>
+          <p:cNvSpPr/>
+          <p:nvPr/>
+        </p:nvSpPr>
+        <p:spPr>
+          <a:xfrm>
+            <a:off x="713232" y="4041648"/>
+            <a:ext cx="2697480" cy="603504"/>
+          </a:xfrm>
+          <a:prstGeom prst="rect">
+            <a:avLst/>
+          </a:prstGeom>
+          <a:noFill/>
+          <a:ln/>
+        </p:spPr>
+        <p:txBody>
+          <a:bodyPr wrap="square" lIns="0" tIns="0" rIns="0" bIns="0" rtlCol="0" anchor="ctr"/>
+          <a:lstStyle/>
+          <a:p>
+            <a:pPr indent="0" marL="0">
+              <a:buNone/>
+            </a:pPr>
+            <a:r>
+              <a:rPr lang="en-US" sz="1100" b="1" spc="50" kern="0" dirty="0">
+                <a:solidFill>
+                  <a:srgbClr val="065F46"/>
+                </a:solidFill>
+              </a:rPr>
+              <a:t>COMPOSITIONAL  (the lead)</a:t>
+            </a:r>
+            <a:endParaRPr lang="en-US" sz="1100" dirty="0"/>
+          </a:p>
+        </p:txBody>
+      </p:sp>
+      <p:sp>
+        <p:nvSpPr>
+          <p:cNvPr id="12" name="Text 9"/>
+          <p:cNvSpPr/>
+          <p:nvPr/>
+        </p:nvSpPr>
+        <p:spPr>
+          <a:xfrm>
+            <a:off x="3474720" y="4041648"/>
+            <a:ext cx="8138160" cy="603504"/>
+          </a:xfrm>
+          <a:prstGeom prst="rect">
+            <a:avLst/>
+          </a:prstGeom>
+          <a:noFill/>
+          <a:ln/>
+        </p:spPr>
+        <p:txBody>
+          <a:bodyPr wrap="square" lIns="0" tIns="0" rIns="0" bIns="0" rtlCol="0" anchor="ctr"/>
+          <a:lstStyle/>
+          <a:p>
+            <a:pPr indent="0" marL="0">
+              <a:buNone/>
+            </a:pPr>
+            <a:r>
+              <a:rPr lang="en-US" sz="1100" dirty="0">
+                <a:solidFill>
+                  <a:srgbClr val="1B2B31"/>
+                </a:solidFill>
+              </a:rPr>
+              <a:t>These are cholangiocyte genes. At F4 there are more cholangiocytes → more of their RNA in the ambient “soup” (plus the odd doublet) enters hepatocyte droplets → hepatocytes look biliary without transdifferentiating.</a:t>
+            </a:r>
+            <a:endParaRPr lang="en-US" sz="1100" dirty="0"/>
+          </a:p>
+        </p:txBody>
+      </p:sp>
+      <p:sp>
+        <p:nvSpPr>
+          <p:cNvPr id="13" name="Shape 10"/>
+          <p:cNvSpPr/>
+          <p:nvPr/>
+        </p:nvSpPr>
+        <p:spPr>
+          <a:xfrm>
+            <a:off x="548640" y="4700016"/>
+            <a:ext cx="11201400" cy="603504"/>
+          </a:xfrm>
+          <a:prstGeom prst="roundRect">
+            <a:avLst>
+              <a:gd name="adj" fmla="val 7576"/>
+            </a:avLst>
+          </a:prstGeom>
+          <a:solidFill>
+            <a:srgbClr val="FBF0E2"/>
+          </a:solidFill>
+          <a:ln/>
+        </p:spPr>
+      </p:sp>
+      <p:sp>
+        <p:nvSpPr>
+          <p:cNvPr id="14" name="Text 11"/>
+          <p:cNvSpPr/>
+          <p:nvPr/>
+        </p:nvSpPr>
+        <p:spPr>
+          <a:xfrm>
+            <a:off x="713232" y="4700016"/>
+            <a:ext cx="2697480" cy="603504"/>
+          </a:xfrm>
+          <a:prstGeom prst="rect">
+            <a:avLst/>
+          </a:prstGeom>
+          <a:noFill/>
+          <a:ln/>
+        </p:spPr>
+        <p:txBody>
+          <a:bodyPr wrap="square" lIns="0" tIns="0" rIns="0" bIns="0" rtlCol="0" anchor="ctr"/>
+          <a:lstStyle/>
+          <a:p>
+            <a:pPr indent="0" marL="0">
+              <a:buNone/>
+            </a:pPr>
+            <a:r>
+              <a:rPr lang="en-US" sz="1100" b="1" spc="50" kern="0" dirty="0">
+                <a:solidFill>
+                  <a:srgbClr val="B45309"/>
+                </a:solidFill>
+              </a:rPr>
+              <a:t>RARE PER CELL  (read it carefully)</a:t>
+            </a:r>
+            <a:endParaRPr lang="en-US" sz="1100" dirty="0"/>
+          </a:p>
+        </p:txBody>
+      </p:sp>
+      <p:sp>
+        <p:nvSpPr>
+          <p:cNvPr id="15" name="Text 12"/>
+          <p:cNvSpPr/>
+          <p:nvPr/>
+        </p:nvSpPr>
+        <p:spPr>
+          <a:xfrm>
+            <a:off x="3474720" y="4700016"/>
+            <a:ext cx="8138160" cy="603504"/>
+          </a:xfrm>
+          <a:prstGeom prst="rect">
+            <a:avLst/>
+          </a:prstGeom>
+          <a:noFill/>
+          <a:ln/>
+        </p:spPr>
+        <p:txBody>
+          <a:bodyPr wrap="square" lIns="0" tIns="0" rIns="0" bIns="0" rtlCol="0" anchor="ctr"/>
+          <a:lstStyle/>
+          <a:p>
+            <a:pPr indent="0" marL="0">
+              <a:buNone/>
+            </a:pPr>
+            <a:r>
+              <a:rPr lang="en-US" sz="1100" dirty="0">
+                <a:solidFill>
+                  <a:srgbClr val="1B2B31"/>
+                </a:solidFill>
+              </a:rPr>
+              <a:t>Only ~0.4% of hepatocyte nuclei co-detect biliary markers at ≥2 UMI — not population-wide. But that is prevalence over ALL hepatocytes: it argues against MASS transdifferentiation, not against a rare sub-population (class imbalance).</a:t>
+            </a:r>
+            <a:endParaRPr lang="en-US" sz="1100" dirty="0"/>
+          </a:p>
+        </p:txBody>
+      </p:sp>
+      <p:sp>
+        <p:nvSpPr>
+          <p:cNvPr id="16" name="Shape 13"/>
+          <p:cNvSpPr/>
+          <p:nvPr/>
+        </p:nvSpPr>
+        <p:spPr>
+          <a:xfrm>
+            <a:off x="548640" y="5358384"/>
+            <a:ext cx="11201400" cy="603504"/>
+          </a:xfrm>
+          <a:prstGeom prst="roundRect">
+            <a:avLst>
+              <a:gd name="adj" fmla="val 7576"/>
+            </a:avLst>
+          </a:prstGeom>
+          <a:solidFill>
+            <a:srgbClr val="FBEEE9"/>
+          </a:solidFill>
+          <a:ln/>
+        </p:spPr>
+      </p:sp>
+      <p:sp>
+        <p:nvSpPr>
+          <p:cNvPr id="17" name="Text 14"/>
+          <p:cNvSpPr/>
+          <p:nvPr/>
+        </p:nvSpPr>
+        <p:spPr>
+          <a:xfrm>
+            <a:off x="713232" y="5358384"/>
+            <a:ext cx="2697480" cy="603504"/>
+          </a:xfrm>
+          <a:prstGeom prst="rect">
+            <a:avLst/>
+          </a:prstGeom>
+          <a:noFill/>
+          <a:ln/>
+        </p:spPr>
+        <p:txBody>
+          <a:bodyPr wrap="square" lIns="0" tIns="0" rIns="0" bIns="0" rtlCol="0" anchor="ctr"/>
+          <a:lstStyle/>
+          <a:p>
+            <a:pPr indent="0" marL="0">
+              <a:buNone/>
+            </a:pPr>
+            <a:r>
+              <a:rPr lang="en-US" sz="1100" b="1" spc="50" kern="0" dirty="0">
+                <a:solidFill>
+                  <a:srgbClr val="BE123C"/>
+                </a:solidFill>
+              </a:rPr>
+              <a:t>OPEN  (a residual survives)</a:t>
+            </a:r>
+            <a:endParaRPr lang="en-US" sz="1100" dirty="0"/>
+          </a:p>
+        </p:txBody>
+      </p:sp>
+      <p:sp>
+        <p:nvSpPr>
+          <p:cNvPr id="18" name="Text 15"/>
+          <p:cNvSpPr/>
+          <p:nvPr/>
+        </p:nvSpPr>
+        <p:spPr>
+          <a:xfrm>
+            <a:off x="3474720" y="5358384"/>
+            <a:ext cx="8138160" cy="603504"/>
+          </a:xfrm>
+          <a:prstGeom prst="rect">
+            <a:avLst/>
+          </a:prstGeom>
+          <a:noFill/>
+          <a:ln/>
+        </p:spPr>
+        <p:txBody>
+          <a:bodyPr wrap="square" lIns="0" tIns="0" rIns="0" bIns="0" rtlCol="0" anchor="ctr"/>
+          <a:lstStyle/>
+          <a:p>
+            <a:pPr indent="0" marL="0">
+              <a:buNone/>
+            </a:pPr>
+            <a:r>
+              <a:rPr lang="en-US" sz="1100" dirty="0">
+                <a:solidFill>
+                  <a:srgbClr val="1B2B31"/>
+                </a:solidFill>
+              </a:rPr>
+              <a:t>decontX removes about half the hits (64 → 34), but EPCAM / SPINT2 / B3GNT3 survive decontamination — ambient can’t explain all of it, so a rare intrinsic state is not excluded.</a:t>
+            </a:r>
+            <a:endParaRPr lang="en-US" sz="1100" dirty="0"/>
+          </a:p>
+        </p:txBody>
+      </p:sp>
+      <p:sp>
+        <p:nvSpPr>
+          <p:cNvPr id="19" name="Text 16"/>
+          <p:cNvSpPr/>
+          <p:nvPr/>
+        </p:nvSpPr>
+        <p:spPr>
+          <a:xfrm>
+            <a:off x="548640" y="6089904"/>
+            <a:ext cx="11247120" cy="320040"/>
+          </a:xfrm>
+          <a:prstGeom prst="rect">
+            <a:avLst/>
+          </a:prstGeom>
+          <a:noFill/>
+          <a:ln/>
+        </p:spPr>
+        <p:txBody>
+          <a:bodyPr wrap="square" rtlCol="0" anchor="ctr"/>
+          <a:lstStyle/>
+          <a:p>
+            <a:pPr algn="l" indent="0" marL="0">
+              <a:buNone/>
+            </a:pPr>
+            <a:r>
+              <a:rPr lang="en-US" sz="1300" b="1" dirty="0">
+                <a:solidFill>
+                  <a:srgbClr val="123F47"/>
+                </a:solidFill>
+              </a:rPr>
+              <a:t>Verdict:  </a:t>
+            </a:r>
+            <a:pPr algn="l" indent="0" marL="0">
+              <a:buNone/>
+            </a:pPr>
+            <a:r>
+              <a:rPr lang="en-US" sz="1300" i="1" dirty="0">
+                <a:solidFill>
+                  <a:srgbClr val="1B2B31"/>
+                </a:solidFill>
+              </a:rPr>
+              <a:t>most consistent with composition / ambient (the ductular reaction) — a lead, not a closed verdict.</a:t>
+            </a:r>
+            <a:endParaRPr lang="en-US" sz="1300" dirty="0"/>
+          </a:p>
+        </p:txBody>
+      </p:sp>
+      <p:sp>
+        <p:nvSpPr>
+          <p:cNvPr id="20" name="Text 17"/>
           <p:cNvSpPr/>
           <p:nvPr/>
         </p:nvSpPr>
